--- a/print-pack/among-us-footprints.pptx
+++ b/print-pack/among-us-footprints.pptx
@@ -3986,7 +3986,7 @@
                 <a:ea typeface="Calibri" pitchFamily="34" charset="-122"/>
                 <a:cs typeface="Calibri" pitchFamily="34" charset="-120"/>
               </a:rPr>
-              <a:t>Wrong box, no stamp.</a:t>
+              <a:t>Wrong box, no mark.</a:t>
             </a:r>
             <a:endParaRPr lang="en-US" sz="1400" dirty="0"/>
           </a:p>
@@ -4219,7 +4219,7 @@
                 <a:ea typeface="Calibri" pitchFamily="34" charset="-122"/>
                 <a:cs typeface="Calibri" pitchFamily="34" charset="-120"/>
               </a:rPr>
-              <a:t>Hand it to the counselor at the other end. They stamp your card.</a:t>
+              <a:t>Hand it to the counselor at the other end. They mark your card.</a:t>
             </a:r>
             <a:endParaRPr lang="en-US" sz="1400" dirty="0"/>
           </a:p>
@@ -5067,7 +5067,7 @@
                 <a:ea typeface="Calibri" pitchFamily="34" charset="-122"/>
                 <a:cs typeface="Calibri" pitchFamily="34" charset="-120"/>
               </a:rPr>
-              <a:t>Do real tasks. Get real stamps. Your card should look exactly like everyone else’s.</a:t>
+              <a:t>Do real tasks. Get real marks. Your card should look exactly like everyone else’s.</a:t>
             </a:r>
             <a:endParaRPr lang="en-US" sz="1300" dirty="0"/>
           </a:p>
@@ -8837,7 +8837,7 @@
                 <a:ea typeface="Calibri" pitchFamily="34" charset="-122"/>
                 <a:cs typeface="Calibri" pitchFamily="34" charset="-120"/>
               </a:rPr>
-              <a:t>Find a counselor to stamp each one. Four counselors, four different stamps.</a:t>
+              <a:t>Find a counselor to mark each one. Four counselors, four different markers.</a:t>
             </a:r>
             <a:endParaRPr lang="en-US" sz="1350" dirty="0"/>
           </a:p>

--- a/print-pack/among-us-footprints.pptx
+++ b/print-pack/among-us-footprints.pptx
@@ -2197,7 +2197,7 @@
           <a:p>
             <a:r>
               <a:rPr lang="en-US" dirty="0"/>
-              <a:t>Announce tonight’s target out loud here. 8 is the normal setting.</a:t>
+              <a:t>Announce tonight’s target out loud here. 5 is the normal setting — 4 easy, 6 hard.</a:t>
             </a:r>
             <a:endParaRPr lang="en-US" dirty="0"/>
           </a:p>
@@ -4514,7 +4514,7 @@
                 <a:ea typeface="Calibri" pitchFamily="34" charset="-122"/>
                 <a:cs typeface="Calibri" pitchFamily="34" charset="-120"/>
               </a:rPr>
-              <a:t>Three of you. Nobody else knows.</a:t>
+              <a:t>A few of you — and you know each other. Nobody else knows.</a:t>
             </a:r>
             <a:endParaRPr lang="en-US" sz="1700" dirty="0"/>
           </a:p>
@@ -4989,7 +4989,7 @@
                 <a:ea typeface="Calibri" pitchFamily="34" charset="-122"/>
                 <a:cs typeface="Calibri" pitchFamily="34" charset="-120"/>
               </a:rPr>
-              <a:t>Count silently to twenty</a:t>
+              <a:t>Walk through a doorway</a:t>
             </a:r>
             <a:endParaRPr lang="en-US" sz="1700" dirty="0"/>
           </a:p>
@@ -5028,7 +5028,7 @@
                 <a:ea typeface="Calibri" pitchFamily="34" charset="-122"/>
                 <a:cs typeface="Calibri" pitchFamily="34" charset="-120"/>
               </a:rPr>
-              <a:t>That is your reload. You cannot kill again until you finish counting.</a:t>
+              <a:t>That is your reload. You cannot kill again until you have left the room.</a:t>
             </a:r>
             <a:endParaRPr lang="en-US" sz="1350" dirty="0"/>
           </a:p>
@@ -5268,7 +5268,7 @@
                 <a:ea typeface="Calibri" pitchFamily="34" charset="-122"/>
                 <a:cs typeface="Calibri" pitchFamily="34" charset="-120"/>
               </a:rPr>
-              <a:t>Tap any counselor with your spoon</a:t>
+              <a:t>Hold a STATUS KIOSK for 2 seconds</a:t>
             </a:r>
             <a:endParaRPr lang="en-US" sz="1700" dirty="0"/>
           </a:p>
@@ -5307,7 +5307,7 @@
                 <a:ea typeface="Calibri" pitchFamily="34" charset="-122"/>
                 <a:cs typeface="Calibri" pitchFamily="34" charset="-120"/>
               </a:rPr>
-              <a:t>They wait a few seconds, then the lights start going down.</a:t>
+              <a:t>It fires after you walk away — nobody sees who. (Tapping a counselor works too.)</a:t>
             </a:r>
             <a:endParaRPr lang="en-US" sz="1350" dirty="0"/>
           </a:p>
@@ -5405,7 +5405,7 @@
                 <a:ea typeface="Calibri" pitchFamily="34" charset="-122"/>
                 <a:cs typeface="Calibri" pitchFamily="34" charset="-120"/>
               </a:rPr>
-              <a:t>Central Command calls five supplies</a:t>
+              <a:t>The TV goes red and calls supplies</a:t>
             </a:r>
             <a:endParaRPr lang="en-US" sz="1700" dirty="0"/>
           </a:p>
@@ -5581,7 +5581,7 @@
                 <a:ea typeface="Calibri" pitchFamily="34" charset="-122"/>
                 <a:cs typeface="Calibri" pitchFamily="34" charset="-120"/>
               </a:rPr>
-              <a:t>ONE ITEM PER PERSON. Five items means five different people. Nobody runs.</a:t>
+              <a:t>ONE ITEM PER PERSON — a different person for every item. Nobody runs.</a:t>
             </a:r>
             <a:endParaRPr lang="en-US" sz="1350" dirty="0"/>
           </a:p>
@@ -7902,7 +7902,7 @@
                 <a:ea typeface="Calibri" pitchFamily="34" charset="-122"/>
                 <a:cs typeface="Calibri" pitchFamily="34" charset="-120"/>
               </a:rPr>
-              <a:t>Ejections are revealed on the spot — a crewmate ticks the death count, an imposter doesn’t.</a:t>
+              <a:t>Ejections are revealed on the spot. A crewmate: no tick — just gone. An imposter: the crew earns +1:00.</a:t>
             </a:r>
             <a:endParaRPr lang="en-US" sz="1300" dirty="0"/>
           </a:p>
@@ -9923,7 +9923,7 @@
                 <a:ea typeface="Calibri" pitchFamily="34" charset="-122"/>
                 <a:cs typeface="Calibri" pitchFamily="34" charset="-120"/>
               </a:rPr>
-              <a:t>Copy the two letters posted for YOUR ROW at all seven doors.</a:t>
+              <a:t>Your card names YOUR 3 doors. Copy the two letters posted for your row at each.</a:t>
             </a:r>
             <a:endParaRPr lang="en-US" sz="1350" dirty="0"/>
           </a:p>

--- a/print-pack/among-us-footprints.pptx
+++ b/print-pack/among-us-footprints.pptx
@@ -7863,7 +7863,7 @@
                 <a:ea typeface="Calibri" pitchFamily="34" charset="-122"/>
                 <a:cs typeface="Calibri" pitchFamily="34" charset="-120"/>
               </a:rPr>
-              <a:t>Walk to a corner to eject. Stand dead centre to skip. Biggest corner wins, ties eject nobody.</a:t>
+              <a:t>Every corner is a name and everyone stands in one. Biggest corner wins. A tie ejects everyone tied.</a:t>
             </a:r>
             <a:endParaRPr lang="en-US" sz="1350" dirty="0"/>
           </a:p>
@@ -7902,7 +7902,7 @@
                 <a:ea typeface="Calibri" pitchFamily="34" charset="-122"/>
                 <a:cs typeface="Calibri" pitchFamily="34" charset="-120"/>
               </a:rPr>
-              <a:t>Ejections are revealed on the spot. A crewmate: no tick — just gone. An imposter: the crew earns +1:00.</a:t>
+              <a:t>Somebody always goes — you vote on WHO, never on whether. Crewmate: no tick, just gone. Imposter: the crew earns +1:00.</a:t>
             </a:r>
             <a:endParaRPr lang="en-US" sz="1300" dirty="0"/>
           </a:p>
